--- a/Data Extraction/5-Data Extraction with Automation.pptx
+++ b/Data Extraction/5-Data Extraction with Automation.pptx
@@ -159,6 +159,9 @@
         </p14:section>
       </p14:sectionLst>
     </p:ext>
+    <p:ext uri="{EFAFB233-063F-42B5-8137-9DF3F51BA10A}">
+      <p15:sldGuideLst xmlns:p15="http://schemas.microsoft.com/office/powerpoint/2012/main"/>
+    </p:ext>
   </p:extLst>
 </p:presentation>
 </file>
@@ -245,7 +248,7 @@
           <a:p>
             <a:fld id="{C3D2F83C-AAC2-4E33-9A5F-70E88C0A9522}" type="datetimeFigureOut">
               <a:rPr lang="en-IN" smtClean="0"/>
-              <a:t>03-Oct-2024 Thu</a:t>
+              <a:t>04-Oct-2024 Fri</a:t>
             </a:fld>
             <a:endParaRPr lang="en-IN"/>
           </a:p>
@@ -1885,9 +1888,9 @@
           <a:bodyPr/>
           <a:lstStyle/>
           <a:p>
-            <a:fld id="{6444479B-705B-4489-957E-7E8A228BDFA0}" type="datetime1">
+            <a:fld id="{9072736C-672D-4DA5-8681-1F9279F49B76}" type="datetime1">
               <a:rPr lang="en-US" smtClean="0"/>
-              <a:t>10/3/2024</a:t>
+              <a:t>10/4/2024</a:t>
             </a:fld>
             <a:endParaRPr lang="en-US"/>
           </a:p>
@@ -2085,9 +2088,9 @@
           <a:bodyPr/>
           <a:lstStyle/>
           <a:p>
-            <a:fld id="{C07B66AD-7C08-490A-ADA4-B47E10FB2407}" type="datetime1">
+            <a:fld id="{3EA76179-9E21-4C02-97FF-7CDB04FE9D32}" type="datetime1">
               <a:rPr lang="en-US" smtClean="0"/>
-              <a:t>10/3/2024</a:t>
+              <a:t>10/4/2024</a:t>
             </a:fld>
             <a:endParaRPr lang="en-US"/>
           </a:p>
@@ -2344,9 +2347,9 @@
           <a:bodyPr/>
           <a:lstStyle/>
           <a:p>
-            <a:fld id="{05B95027-4255-49E7-9841-CD21BCC99996}" type="datetime1">
+            <a:fld id="{B35109AB-F437-4E54-BA81-1B12AF8EBD2B}" type="datetime1">
               <a:rPr lang="en-US" smtClean="0"/>
-              <a:t>10/3/2024</a:t>
+              <a:t>10/4/2024</a:t>
             </a:fld>
             <a:endParaRPr lang="en-US"/>
           </a:p>
@@ -2585,9 +2588,9 @@
           <a:bodyPr/>
           <a:lstStyle/>
           <a:p>
-            <a:fld id="{9F89F774-3FA6-43B8-9241-99959C8FD463}" type="datetime1">
+            <a:fld id="{F62F8F10-32DF-4533-9FEA-97C16DA6079B}" type="datetime1">
               <a:rPr lang="en-US" smtClean="0"/>
-              <a:t>10/3/2024</a:t>
+              <a:t>10/4/2024</a:t>
             </a:fld>
             <a:endParaRPr lang="en-US"/>
           </a:p>
@@ -2912,9 +2915,9 @@
           <a:bodyPr/>
           <a:lstStyle/>
           <a:p>
-            <a:fld id="{F9504452-5DCC-4FE2-A5C9-8A5EF6714D65}" type="datetime1">
+            <a:fld id="{9359316D-4CC0-4737-9FA0-BC68C490A4F7}" type="datetime1">
               <a:rPr lang="en-US" smtClean="0"/>
-              <a:t>10/3/2024</a:t>
+              <a:t>10/4/2024</a:t>
             </a:fld>
             <a:endParaRPr lang="en-US"/>
           </a:p>
@@ -3222,9 +3225,9 @@
           <a:bodyPr/>
           <a:lstStyle/>
           <a:p>
-            <a:fld id="{E579ABC2-0180-4F3A-A895-A85BC724D472}" type="datetime1">
+            <a:fld id="{2BE423B1-6F2F-48A1-A5FF-9EB90F447804}" type="datetime1">
               <a:rPr lang="en-US" smtClean="0"/>
-              <a:t>10/3/2024</a:t>
+              <a:t>10/4/2024</a:t>
             </a:fld>
             <a:endParaRPr lang="en-US"/>
           </a:p>
@@ -3640,9 +3643,9 @@
           <a:bodyPr/>
           <a:lstStyle/>
           <a:p>
-            <a:fld id="{6AEEA9BA-4E8F-439E-BEA4-91FBA01E3F5F}" type="datetime1">
+            <a:fld id="{0ADCDA4E-47CF-48D6-88F8-C7FBF6C42B94}" type="datetime1">
               <a:rPr lang="en-US" smtClean="0"/>
-              <a:t>10/3/2024</a:t>
+              <a:t>10/4/2024</a:t>
             </a:fld>
             <a:endParaRPr lang="en-US"/>
           </a:p>
@@ -3782,9 +3785,9 @@
           <a:bodyPr/>
           <a:lstStyle/>
           <a:p>
-            <a:fld id="{BE15BF18-0007-481C-AA29-413124BC3EE7}" type="datetime1">
+            <a:fld id="{DC8CF005-6140-494E-8656-6A566A673BD4}" type="datetime1">
               <a:rPr lang="en-US" smtClean="0"/>
-              <a:t>10/3/2024</a:t>
+              <a:t>10/4/2024</a:t>
             </a:fld>
             <a:endParaRPr lang="en-US"/>
           </a:p>
@@ -3944,9 +3947,9 @@
           <a:bodyPr/>
           <a:lstStyle/>
           <a:p>
-            <a:fld id="{09BE9870-3748-43AD-B547-02A075CB4A1D}" type="datetime1">
+            <a:fld id="{96EA1D32-926E-44E0-A24A-7D8339BBB6AA}" type="datetime1">
               <a:rPr lang="en-US" smtClean="0"/>
-              <a:t>10/3/2024</a:t>
+              <a:t>10/4/2024</a:t>
             </a:fld>
             <a:endParaRPr lang="en-US"/>
           </a:p>
@@ -4261,9 +4264,9 @@
           <a:bodyPr/>
           <a:lstStyle/>
           <a:p>
-            <a:fld id="{558E7897-33C5-4F1A-9307-D068E37F3DC7}" type="datetime1">
+            <a:fld id="{225237EF-D17C-4C6D-BC27-A17DC359D727}" type="datetime1">
               <a:rPr lang="en-US" smtClean="0"/>
-              <a:t>10/3/2024</a:t>
+              <a:t>10/4/2024</a:t>
             </a:fld>
             <a:endParaRPr lang="en-US"/>
           </a:p>
@@ -4556,9 +4559,9 @@
           <a:bodyPr/>
           <a:lstStyle/>
           <a:p>
-            <a:fld id="{82E171BA-CC09-47C8-A6DF-F5C5CB59CEEC}" type="datetime1">
+            <a:fld id="{366E56F2-B338-4CA0-8246-373893774AF2}" type="datetime1">
               <a:rPr lang="en-US" smtClean="0"/>
-              <a:t>10/3/2024</a:t>
+              <a:t>10/4/2024</a:t>
             </a:fld>
             <a:endParaRPr lang="en-US"/>
           </a:p>
@@ -4797,9 +4800,9 @@
             </a:lvl1pPr>
           </a:lstStyle>
           <a:p>
-            <a:fld id="{7DA38F49-B3E2-4BF0-BEC7-C30D34ABBB8D}" type="datetime1">
+            <a:fld id="{B0079C86-DB2F-43EE-9CA3-C52577D7302F}" type="datetime1">
               <a:rPr lang="en-US" smtClean="0"/>
-              <a:t>10/3/2024</a:t>
+              <a:t>10/4/2024</a:t>
             </a:fld>
             <a:endParaRPr lang="en-US"/>
           </a:p>
@@ -4954,7 +4957,7 @@
     <p:sldLayoutId id="2147483670" r:id="rId10"/>
     <p:sldLayoutId id="2147483671" r:id="rId11"/>
   </p:sldLayoutIdLst>
-  <p:hf sldNum="0" hdr="0" ftr="0" dt="0"/>
+  <p:hf hdr="0" ftr="0" dt="0"/>
   <p:txStyles>
     <p:titleStyle>
       <a:lvl1pPr algn="l" defTabSz="914400" rtl="0" eaLnBrk="1" latinLnBrk="0" hangingPunct="1">
@@ -5525,6 +5528,35 @@
           </a:fontRef>
         </p:style>
       </p:cxnSp>
+      <p:sp>
+        <p:nvSpPr>
+          <p:cNvPr id="5" name="Slide Number Placeholder 4">
+            <a:extLst>
+              <a:ext uri="{FF2B5EF4-FFF2-40B4-BE49-F238E27FC236}">
+                <a16:creationId xmlns:a16="http://schemas.microsoft.com/office/drawing/2014/main" id="{47ACC22A-FA05-600B-16D5-43C2B0C689DD}"/>
+              </a:ext>
+            </a:extLst>
+          </p:cNvPr>
+          <p:cNvSpPr>
+            <a:spLocks noGrp="1"/>
+          </p:cNvSpPr>
+          <p:nvPr>
+            <p:ph type="sldNum" sz="quarter" idx="12"/>
+          </p:nvPr>
+        </p:nvSpPr>
+        <p:spPr/>
+        <p:txBody>
+          <a:bodyPr/>
+          <a:lstStyle/>
+          <a:p>
+            <a:fld id="{70C12960-6E85-460F-B6E3-5B82CB31AF3D}" type="slidenum">
+              <a:rPr lang="en-US" smtClean="0"/>
+              <a:t>1</a:t>
+            </a:fld>
+            <a:endParaRPr lang="en-US"/>
+          </a:p>
+        </p:txBody>
+      </p:sp>
     </p:spTree>
     <p:extLst>
       <p:ext uri="{BB962C8B-B14F-4D97-AF65-F5344CB8AC3E}">
@@ -6111,6 +6143,35 @@
           </a:p>
         </p:txBody>
       </p:sp>
+      <p:sp>
+        <p:nvSpPr>
+          <p:cNvPr id="3" name="Slide Number Placeholder 2">
+            <a:extLst>
+              <a:ext uri="{FF2B5EF4-FFF2-40B4-BE49-F238E27FC236}">
+                <a16:creationId xmlns:a16="http://schemas.microsoft.com/office/drawing/2014/main" id="{71C014D5-CFB0-61FD-3CFA-913C24E693AC}"/>
+              </a:ext>
+            </a:extLst>
+          </p:cNvPr>
+          <p:cNvSpPr>
+            <a:spLocks noGrp="1"/>
+          </p:cNvSpPr>
+          <p:nvPr>
+            <p:ph type="sldNum" sz="quarter" idx="12"/>
+          </p:nvPr>
+        </p:nvSpPr>
+        <p:spPr/>
+        <p:txBody>
+          <a:bodyPr/>
+          <a:lstStyle/>
+          <a:p>
+            <a:fld id="{70C12960-6E85-460F-B6E3-5B82CB31AF3D}" type="slidenum">
+              <a:rPr lang="en-US" smtClean="0"/>
+              <a:t>10</a:t>
+            </a:fld>
+            <a:endParaRPr lang="en-US"/>
+          </a:p>
+        </p:txBody>
+      </p:sp>
     </p:spTree>
     <p:extLst>
       <p:ext uri="{BB962C8B-B14F-4D97-AF65-F5344CB8AC3E}">
@@ -6572,6 +6633,35 @@
           </a:fontRef>
         </p:style>
       </p:cxnSp>
+      <p:sp>
+        <p:nvSpPr>
+          <p:cNvPr id="3" name="Slide Number Placeholder 2">
+            <a:extLst>
+              <a:ext uri="{FF2B5EF4-FFF2-40B4-BE49-F238E27FC236}">
+                <a16:creationId xmlns:a16="http://schemas.microsoft.com/office/drawing/2014/main" id="{67483E37-33F9-5635-7992-1B5EB4F938A8}"/>
+              </a:ext>
+            </a:extLst>
+          </p:cNvPr>
+          <p:cNvSpPr>
+            <a:spLocks noGrp="1"/>
+          </p:cNvSpPr>
+          <p:nvPr>
+            <p:ph type="sldNum" sz="quarter" idx="12"/>
+          </p:nvPr>
+        </p:nvSpPr>
+        <p:spPr/>
+        <p:txBody>
+          <a:bodyPr/>
+          <a:lstStyle/>
+          <a:p>
+            <a:fld id="{70C12960-6E85-460F-B6E3-5B82CB31AF3D}" type="slidenum">
+              <a:rPr lang="en-US" smtClean="0"/>
+              <a:t>11</a:t>
+            </a:fld>
+            <a:endParaRPr lang="en-US"/>
+          </a:p>
+        </p:txBody>
+      </p:sp>
     </p:spTree>
     <p:extLst>
       <p:ext uri="{BB962C8B-B14F-4D97-AF65-F5344CB8AC3E}">
@@ -7046,6 +7136,35 @@
           </a:p>
         </p:txBody>
       </p:sp>
+      <p:sp>
+        <p:nvSpPr>
+          <p:cNvPr id="3" name="Slide Number Placeholder 2">
+            <a:extLst>
+              <a:ext uri="{FF2B5EF4-FFF2-40B4-BE49-F238E27FC236}">
+                <a16:creationId xmlns:a16="http://schemas.microsoft.com/office/drawing/2014/main" id="{81B23D63-A5A1-3952-2293-279A21126B01}"/>
+              </a:ext>
+            </a:extLst>
+          </p:cNvPr>
+          <p:cNvSpPr>
+            <a:spLocks noGrp="1"/>
+          </p:cNvSpPr>
+          <p:nvPr>
+            <p:ph type="sldNum" sz="quarter" idx="12"/>
+          </p:nvPr>
+        </p:nvSpPr>
+        <p:spPr/>
+        <p:txBody>
+          <a:bodyPr/>
+          <a:lstStyle/>
+          <a:p>
+            <a:fld id="{70C12960-6E85-460F-B6E3-5B82CB31AF3D}" type="slidenum">
+              <a:rPr lang="en-US" smtClean="0"/>
+              <a:t>12</a:t>
+            </a:fld>
+            <a:endParaRPr lang="en-US"/>
+          </a:p>
+        </p:txBody>
+      </p:sp>
     </p:spTree>
     <p:extLst>
       <p:ext uri="{BB962C8B-B14F-4D97-AF65-F5344CB8AC3E}">
@@ -7525,6 +7644,35 @@
           </a:p>
         </p:txBody>
       </p:sp>
+      <p:sp>
+        <p:nvSpPr>
+          <p:cNvPr id="3" name="Slide Number Placeholder 2">
+            <a:extLst>
+              <a:ext uri="{FF2B5EF4-FFF2-40B4-BE49-F238E27FC236}">
+                <a16:creationId xmlns:a16="http://schemas.microsoft.com/office/drawing/2014/main" id="{C5832515-204C-1323-F48F-0FD5FF9D397D}"/>
+              </a:ext>
+            </a:extLst>
+          </p:cNvPr>
+          <p:cNvSpPr>
+            <a:spLocks noGrp="1"/>
+          </p:cNvSpPr>
+          <p:nvPr>
+            <p:ph type="sldNum" sz="quarter" idx="12"/>
+          </p:nvPr>
+        </p:nvSpPr>
+        <p:spPr/>
+        <p:txBody>
+          <a:bodyPr/>
+          <a:lstStyle/>
+          <a:p>
+            <a:fld id="{70C12960-6E85-460F-B6E3-5B82CB31AF3D}" type="slidenum">
+              <a:rPr lang="en-US" smtClean="0"/>
+              <a:t>13</a:t>
+            </a:fld>
+            <a:endParaRPr lang="en-US"/>
+          </a:p>
+        </p:txBody>
+      </p:sp>
     </p:spTree>
     <p:extLst>
       <p:ext uri="{BB962C8B-B14F-4D97-AF65-F5344CB8AC3E}">
@@ -7840,6 +7988,35 @@
               <a:t>Data extraction with automation offers significant benefits to organizations, allowing them to gain valuable insights and make more informed decisions by leveraging APIs, automating data extraction, and learning from real-world examples.</a:t>
             </a:r>
             <a:endParaRPr lang="en-IN" sz="1400"/>
+          </a:p>
+        </p:txBody>
+      </p:sp>
+      <p:sp>
+        <p:nvSpPr>
+          <p:cNvPr id="4" name="Slide Number Placeholder 3">
+            <a:extLst>
+              <a:ext uri="{FF2B5EF4-FFF2-40B4-BE49-F238E27FC236}">
+                <a16:creationId xmlns:a16="http://schemas.microsoft.com/office/drawing/2014/main" id="{7997B7A0-ECB3-7110-0555-35A57D0BDD4C}"/>
+              </a:ext>
+            </a:extLst>
+          </p:cNvPr>
+          <p:cNvSpPr>
+            <a:spLocks noGrp="1"/>
+          </p:cNvSpPr>
+          <p:nvPr>
+            <p:ph type="sldNum" sz="quarter" idx="12"/>
+          </p:nvPr>
+        </p:nvSpPr>
+        <p:spPr/>
+        <p:txBody>
+          <a:bodyPr/>
+          <a:lstStyle/>
+          <a:p>
+            <a:fld id="{70C12960-6E85-460F-B6E3-5B82CB31AF3D}" type="slidenum">
+              <a:rPr lang="en-US" smtClean="0"/>
+              <a:t>14</a:t>
+            </a:fld>
+            <a:endParaRPr lang="en-US"/>
           </a:p>
         </p:txBody>
       </p:sp>
@@ -8261,6 +8438,35 @@
           </a:p>
         </p:txBody>
       </p:sp>
+      <p:sp>
+        <p:nvSpPr>
+          <p:cNvPr id="3" name="Slide Number Placeholder 2">
+            <a:extLst>
+              <a:ext uri="{FF2B5EF4-FFF2-40B4-BE49-F238E27FC236}">
+                <a16:creationId xmlns:a16="http://schemas.microsoft.com/office/drawing/2014/main" id="{22D62C45-AFA9-199D-5554-70345CD087C3}"/>
+              </a:ext>
+            </a:extLst>
+          </p:cNvPr>
+          <p:cNvSpPr>
+            <a:spLocks noGrp="1"/>
+          </p:cNvSpPr>
+          <p:nvPr>
+            <p:ph type="sldNum" sz="quarter" idx="12"/>
+          </p:nvPr>
+        </p:nvSpPr>
+        <p:spPr/>
+        <p:txBody>
+          <a:bodyPr/>
+          <a:lstStyle/>
+          <a:p>
+            <a:fld id="{70C12960-6E85-460F-B6E3-5B82CB31AF3D}" type="slidenum">
+              <a:rPr lang="en-US" smtClean="0"/>
+              <a:t>2</a:t>
+            </a:fld>
+            <a:endParaRPr lang="en-US"/>
+          </a:p>
+        </p:txBody>
+      </p:sp>
     </p:spTree>
     <p:extLst>
       <p:ext uri="{BB962C8B-B14F-4D97-AF65-F5344CB8AC3E}">
@@ -8722,6 +8928,35 @@
           </a:fontRef>
         </p:style>
       </p:cxnSp>
+      <p:sp>
+        <p:nvSpPr>
+          <p:cNvPr id="3" name="Slide Number Placeholder 2">
+            <a:extLst>
+              <a:ext uri="{FF2B5EF4-FFF2-40B4-BE49-F238E27FC236}">
+                <a16:creationId xmlns:a16="http://schemas.microsoft.com/office/drawing/2014/main" id="{08360E6D-B061-7458-C827-B4DC795C846A}"/>
+              </a:ext>
+            </a:extLst>
+          </p:cNvPr>
+          <p:cNvSpPr>
+            <a:spLocks noGrp="1"/>
+          </p:cNvSpPr>
+          <p:nvPr>
+            <p:ph type="sldNum" sz="quarter" idx="12"/>
+          </p:nvPr>
+        </p:nvSpPr>
+        <p:spPr/>
+        <p:txBody>
+          <a:bodyPr/>
+          <a:lstStyle/>
+          <a:p>
+            <a:fld id="{70C12960-6E85-460F-B6E3-5B82CB31AF3D}" type="slidenum">
+              <a:rPr lang="en-US" smtClean="0"/>
+              <a:t>3</a:t>
+            </a:fld>
+            <a:endParaRPr lang="en-US"/>
+          </a:p>
+        </p:txBody>
+      </p:sp>
     </p:spTree>
     <p:extLst>
       <p:ext uri="{BB962C8B-B14F-4D97-AF65-F5344CB8AC3E}">
@@ -9175,6 +9410,35 @@
           </a:p>
         </p:txBody>
       </p:sp>
+      <p:sp>
+        <p:nvSpPr>
+          <p:cNvPr id="3" name="Slide Number Placeholder 2">
+            <a:extLst>
+              <a:ext uri="{FF2B5EF4-FFF2-40B4-BE49-F238E27FC236}">
+                <a16:creationId xmlns:a16="http://schemas.microsoft.com/office/drawing/2014/main" id="{BB5205EB-7600-5372-E3B4-DC2743F53A45}"/>
+              </a:ext>
+            </a:extLst>
+          </p:cNvPr>
+          <p:cNvSpPr>
+            <a:spLocks noGrp="1"/>
+          </p:cNvSpPr>
+          <p:nvPr>
+            <p:ph type="sldNum" sz="quarter" idx="12"/>
+          </p:nvPr>
+        </p:nvSpPr>
+        <p:spPr/>
+        <p:txBody>
+          <a:bodyPr/>
+          <a:lstStyle/>
+          <a:p>
+            <a:fld id="{70C12960-6E85-460F-B6E3-5B82CB31AF3D}" type="slidenum">
+              <a:rPr lang="en-US" smtClean="0"/>
+              <a:t>4</a:t>
+            </a:fld>
+            <a:endParaRPr lang="en-US"/>
+          </a:p>
+        </p:txBody>
+      </p:sp>
     </p:spTree>
     <p:extLst>
       <p:ext uri="{BB962C8B-B14F-4D97-AF65-F5344CB8AC3E}">
@@ -9654,6 +9918,35 @@
           </a:p>
         </p:txBody>
       </p:sp>
+      <p:sp>
+        <p:nvSpPr>
+          <p:cNvPr id="3" name="Slide Number Placeholder 2">
+            <a:extLst>
+              <a:ext uri="{FF2B5EF4-FFF2-40B4-BE49-F238E27FC236}">
+                <a16:creationId xmlns:a16="http://schemas.microsoft.com/office/drawing/2014/main" id="{D990F8A2-202D-057C-79AB-273E0408E3DD}"/>
+              </a:ext>
+            </a:extLst>
+          </p:cNvPr>
+          <p:cNvSpPr>
+            <a:spLocks noGrp="1"/>
+          </p:cNvSpPr>
+          <p:nvPr>
+            <p:ph type="sldNum" sz="quarter" idx="12"/>
+          </p:nvPr>
+        </p:nvSpPr>
+        <p:spPr/>
+        <p:txBody>
+          <a:bodyPr/>
+          <a:lstStyle/>
+          <a:p>
+            <a:fld id="{70C12960-6E85-460F-B6E3-5B82CB31AF3D}" type="slidenum">
+              <a:rPr lang="en-US" smtClean="0"/>
+              <a:t>5</a:t>
+            </a:fld>
+            <a:endParaRPr lang="en-US"/>
+          </a:p>
+        </p:txBody>
+      </p:sp>
     </p:spTree>
     <p:extLst>
       <p:ext uri="{BB962C8B-B14F-4D97-AF65-F5344CB8AC3E}">
@@ -10133,6 +10426,35 @@
           </a:p>
         </p:txBody>
       </p:sp>
+      <p:sp>
+        <p:nvSpPr>
+          <p:cNvPr id="3" name="Slide Number Placeholder 2">
+            <a:extLst>
+              <a:ext uri="{FF2B5EF4-FFF2-40B4-BE49-F238E27FC236}">
+                <a16:creationId xmlns:a16="http://schemas.microsoft.com/office/drawing/2014/main" id="{6AB12308-DBAF-F635-914A-E72CC4A84C31}"/>
+              </a:ext>
+            </a:extLst>
+          </p:cNvPr>
+          <p:cNvSpPr>
+            <a:spLocks noGrp="1"/>
+          </p:cNvSpPr>
+          <p:nvPr>
+            <p:ph type="sldNum" sz="quarter" idx="12"/>
+          </p:nvPr>
+        </p:nvSpPr>
+        <p:spPr/>
+        <p:txBody>
+          <a:bodyPr/>
+          <a:lstStyle/>
+          <a:p>
+            <a:fld id="{70C12960-6E85-460F-B6E3-5B82CB31AF3D}" type="slidenum">
+              <a:rPr lang="en-US" smtClean="0"/>
+              <a:t>6</a:t>
+            </a:fld>
+            <a:endParaRPr lang="en-US"/>
+          </a:p>
+        </p:txBody>
+      </p:sp>
     </p:spTree>
     <p:extLst>
       <p:ext uri="{BB962C8B-B14F-4D97-AF65-F5344CB8AC3E}">
@@ -10612,6 +10934,35 @@
           </a:p>
         </p:txBody>
       </p:sp>
+      <p:sp>
+        <p:nvSpPr>
+          <p:cNvPr id="3" name="Slide Number Placeholder 2">
+            <a:extLst>
+              <a:ext uri="{FF2B5EF4-FFF2-40B4-BE49-F238E27FC236}">
+                <a16:creationId xmlns:a16="http://schemas.microsoft.com/office/drawing/2014/main" id="{F95816EA-7FDE-E6D9-AB36-D0A9BEE35B8B}"/>
+              </a:ext>
+            </a:extLst>
+          </p:cNvPr>
+          <p:cNvSpPr>
+            <a:spLocks noGrp="1"/>
+          </p:cNvSpPr>
+          <p:nvPr>
+            <p:ph type="sldNum" sz="quarter" idx="12"/>
+          </p:nvPr>
+        </p:nvSpPr>
+        <p:spPr/>
+        <p:txBody>
+          <a:bodyPr/>
+          <a:lstStyle/>
+          <a:p>
+            <a:fld id="{70C12960-6E85-460F-B6E3-5B82CB31AF3D}" type="slidenum">
+              <a:rPr lang="en-US" smtClean="0"/>
+              <a:t>7</a:t>
+            </a:fld>
+            <a:endParaRPr lang="en-US"/>
+          </a:p>
+        </p:txBody>
+      </p:sp>
     </p:spTree>
     <p:extLst>
       <p:ext uri="{BB962C8B-B14F-4D97-AF65-F5344CB8AC3E}">
@@ -11073,6 +11424,35 @@
           </a:fontRef>
         </p:style>
       </p:cxnSp>
+      <p:sp>
+        <p:nvSpPr>
+          <p:cNvPr id="3" name="Slide Number Placeholder 2">
+            <a:extLst>
+              <a:ext uri="{FF2B5EF4-FFF2-40B4-BE49-F238E27FC236}">
+                <a16:creationId xmlns:a16="http://schemas.microsoft.com/office/drawing/2014/main" id="{CF093374-D1E6-E506-50B0-454C420DBC40}"/>
+              </a:ext>
+            </a:extLst>
+          </p:cNvPr>
+          <p:cNvSpPr>
+            <a:spLocks noGrp="1"/>
+          </p:cNvSpPr>
+          <p:nvPr>
+            <p:ph type="sldNum" sz="quarter" idx="12"/>
+          </p:nvPr>
+        </p:nvSpPr>
+        <p:spPr/>
+        <p:txBody>
+          <a:bodyPr/>
+          <a:lstStyle/>
+          <a:p>
+            <a:fld id="{70C12960-6E85-460F-B6E3-5B82CB31AF3D}" type="slidenum">
+              <a:rPr lang="en-US" smtClean="0"/>
+              <a:t>8</a:t>
+            </a:fld>
+            <a:endParaRPr lang="en-US"/>
+          </a:p>
+        </p:txBody>
+      </p:sp>
     </p:spTree>
     <p:extLst>
       <p:ext uri="{BB962C8B-B14F-4D97-AF65-F5344CB8AC3E}">
@@ -11562,6 +11942,35 @@
               <a:t>UiPath and Automation Anywhere are popular commercial tools used for automating repetitive tasks. They provide a range of features for automating various processes, including data extraction, data processing, and report generation.</a:t>
             </a:r>
             <a:endParaRPr lang="en-IN" sz="1400"/>
+          </a:p>
+        </p:txBody>
+      </p:sp>
+      <p:sp>
+        <p:nvSpPr>
+          <p:cNvPr id="3" name="Slide Number Placeholder 2">
+            <a:extLst>
+              <a:ext uri="{FF2B5EF4-FFF2-40B4-BE49-F238E27FC236}">
+                <a16:creationId xmlns:a16="http://schemas.microsoft.com/office/drawing/2014/main" id="{97F0AA03-5AFF-C637-E2FE-6A5C686B821D}"/>
+              </a:ext>
+            </a:extLst>
+          </p:cNvPr>
+          <p:cNvSpPr>
+            <a:spLocks noGrp="1"/>
+          </p:cNvSpPr>
+          <p:nvPr>
+            <p:ph type="sldNum" sz="quarter" idx="12"/>
+          </p:nvPr>
+        </p:nvSpPr>
+        <p:spPr/>
+        <p:txBody>
+          <a:bodyPr/>
+          <a:lstStyle/>
+          <a:p>
+            <a:fld id="{70C12960-6E85-460F-B6E3-5B82CB31AF3D}" type="slidenum">
+              <a:rPr lang="en-US" smtClean="0"/>
+              <a:t>9</a:t>
+            </a:fld>
+            <a:endParaRPr lang="en-US"/>
           </a:p>
         </p:txBody>
       </p:sp>
